--- a/slides/dm-compass-ketometer/DM_Compass_vol2_ケトメーター判定.pptx
+++ b/slides/dm-compass-ketometer/DM_Compass_vol2_ケトメーター判定.pptx
@@ -18,7 +18,7 @@
     <p:sldId id="266" r:id="rId17"/>
     <p:sldId id="267" r:id="rId18"/>
   </p:sldIdLst>
-  <p:sldSz cx="12192000" cy="6858000" type="screen4x3"/>
+  <p:sldSz cx="12191695" cy="6858000" type="screen4x3"/>
   <p:notesSz cx="6858000" cy="9144000"/>
   <p:defaultTextStyle>
     <a:defPPr>
@@ -3092,14 +3092,6 @@
 <file path=ppt/slides/slide1.xml><?xml version="1.0" encoding="utf-8"?>
 <p:sld xmlns:a="http://schemas.openxmlformats.org/drawingml/2006/main" xmlns:p="http://schemas.openxmlformats.org/presentationml/2006/main" xmlns:r="http://schemas.openxmlformats.org/officeDocument/2006/relationships">
   <p:cSld>
-    <p:bg>
-      <p:bgPr>
-        <a:solidFill>
-          <a:srgbClr val="0A1A1A"/>
-        </a:solidFill>
-        <a:effectLst/>
-      </p:bgPr>
-    </p:bg>
     <p:spTree>
       <p:nvGrpSpPr>
         <p:cNvPr id="1" name=""/>
@@ -3124,7 +3116,7 @@
         <p:spPr>
           <a:xfrm>
             <a:off x="0" y="0"/>
-            <a:ext cx="12192000" cy="6858000"/>
+            <a:ext cx="12191695" cy="6858000"/>
           </a:xfrm>
           <a:prstGeom prst="rect">
             <a:avLst/>
@@ -3142,14 +3134,6 @@
 <file path=ppt/slides/slide10.xml><?xml version="1.0" encoding="utf-8"?>
 <p:sld xmlns:a="http://schemas.openxmlformats.org/drawingml/2006/main" xmlns:p="http://schemas.openxmlformats.org/presentationml/2006/main" xmlns:r="http://schemas.openxmlformats.org/officeDocument/2006/relationships">
   <p:cSld>
-    <p:bg>
-      <p:bgPr>
-        <a:solidFill>
-          <a:srgbClr val="0A1A1A"/>
-        </a:solidFill>
-        <a:effectLst/>
-      </p:bgPr>
-    </p:bg>
     <p:spTree>
       <p:nvGrpSpPr>
         <p:cNvPr id="1" name=""/>
@@ -3174,7 +3158,7 @@
         <p:spPr>
           <a:xfrm>
             <a:off x="0" y="0"/>
-            <a:ext cx="12192000" cy="6858000"/>
+            <a:ext cx="12191695" cy="6858000"/>
           </a:xfrm>
           <a:prstGeom prst="rect">
             <a:avLst/>
@@ -3192,14 +3176,6 @@
 <file path=ppt/slides/slide11.xml><?xml version="1.0" encoding="utf-8"?>
 <p:sld xmlns:a="http://schemas.openxmlformats.org/drawingml/2006/main" xmlns:p="http://schemas.openxmlformats.org/presentationml/2006/main" xmlns:r="http://schemas.openxmlformats.org/officeDocument/2006/relationships">
   <p:cSld>
-    <p:bg>
-      <p:bgPr>
-        <a:solidFill>
-          <a:srgbClr val="0A1A1A"/>
-        </a:solidFill>
-        <a:effectLst/>
-      </p:bgPr>
-    </p:bg>
     <p:spTree>
       <p:nvGrpSpPr>
         <p:cNvPr id="1" name=""/>
@@ -3224,7 +3200,7 @@
         <p:spPr>
           <a:xfrm>
             <a:off x="0" y="0"/>
-            <a:ext cx="12192000" cy="6858000"/>
+            <a:ext cx="12191695" cy="6858000"/>
           </a:xfrm>
           <a:prstGeom prst="rect">
             <a:avLst/>
@@ -3242,14 +3218,6 @@
 <file path=ppt/slides/slide12.xml><?xml version="1.0" encoding="utf-8"?>
 <p:sld xmlns:a="http://schemas.openxmlformats.org/drawingml/2006/main" xmlns:p="http://schemas.openxmlformats.org/presentationml/2006/main" xmlns:r="http://schemas.openxmlformats.org/officeDocument/2006/relationships">
   <p:cSld>
-    <p:bg>
-      <p:bgPr>
-        <a:solidFill>
-          <a:srgbClr val="0A1A1A"/>
-        </a:solidFill>
-        <a:effectLst/>
-      </p:bgPr>
-    </p:bg>
     <p:spTree>
       <p:nvGrpSpPr>
         <p:cNvPr id="1" name=""/>
@@ -3274,7 +3242,7 @@
         <p:spPr>
           <a:xfrm>
             <a:off x="0" y="0"/>
-            <a:ext cx="12192000" cy="6858000"/>
+            <a:ext cx="12191695" cy="6858000"/>
           </a:xfrm>
           <a:prstGeom prst="rect">
             <a:avLst/>
@@ -3292,14 +3260,6 @@
 <file path=ppt/slides/slide2.xml><?xml version="1.0" encoding="utf-8"?>
 <p:sld xmlns:a="http://schemas.openxmlformats.org/drawingml/2006/main" xmlns:p="http://schemas.openxmlformats.org/presentationml/2006/main" xmlns:r="http://schemas.openxmlformats.org/officeDocument/2006/relationships">
   <p:cSld>
-    <p:bg>
-      <p:bgPr>
-        <a:solidFill>
-          <a:srgbClr val="0A1A1A"/>
-        </a:solidFill>
-        <a:effectLst/>
-      </p:bgPr>
-    </p:bg>
     <p:spTree>
       <p:nvGrpSpPr>
         <p:cNvPr id="1" name=""/>
@@ -3324,7 +3284,7 @@
         <p:spPr>
           <a:xfrm>
             <a:off x="0" y="0"/>
-            <a:ext cx="12192000" cy="6858000"/>
+            <a:ext cx="12191695" cy="6858000"/>
           </a:xfrm>
           <a:prstGeom prst="rect">
             <a:avLst/>
@@ -3342,14 +3302,6 @@
 <file path=ppt/slides/slide3.xml><?xml version="1.0" encoding="utf-8"?>
 <p:sld xmlns:a="http://schemas.openxmlformats.org/drawingml/2006/main" xmlns:p="http://schemas.openxmlformats.org/presentationml/2006/main" xmlns:r="http://schemas.openxmlformats.org/officeDocument/2006/relationships">
   <p:cSld>
-    <p:bg>
-      <p:bgPr>
-        <a:solidFill>
-          <a:srgbClr val="0A1A1A"/>
-        </a:solidFill>
-        <a:effectLst/>
-      </p:bgPr>
-    </p:bg>
     <p:spTree>
       <p:nvGrpSpPr>
         <p:cNvPr id="1" name=""/>
@@ -3374,7 +3326,7 @@
         <p:spPr>
           <a:xfrm>
             <a:off x="0" y="0"/>
-            <a:ext cx="12192000" cy="6858000"/>
+            <a:ext cx="12191695" cy="6858000"/>
           </a:xfrm>
           <a:prstGeom prst="rect">
             <a:avLst/>
@@ -3392,14 +3344,6 @@
 <file path=ppt/slides/slide4.xml><?xml version="1.0" encoding="utf-8"?>
 <p:sld xmlns:a="http://schemas.openxmlformats.org/drawingml/2006/main" xmlns:p="http://schemas.openxmlformats.org/presentationml/2006/main" xmlns:r="http://schemas.openxmlformats.org/officeDocument/2006/relationships">
   <p:cSld>
-    <p:bg>
-      <p:bgPr>
-        <a:solidFill>
-          <a:srgbClr val="0A1A1A"/>
-        </a:solidFill>
-        <a:effectLst/>
-      </p:bgPr>
-    </p:bg>
     <p:spTree>
       <p:nvGrpSpPr>
         <p:cNvPr id="1" name=""/>
@@ -3424,7 +3368,7 @@
         <p:spPr>
           <a:xfrm>
             <a:off x="0" y="0"/>
-            <a:ext cx="12192000" cy="6858000"/>
+            <a:ext cx="12191695" cy="6858000"/>
           </a:xfrm>
           <a:prstGeom prst="rect">
             <a:avLst/>
@@ -3442,14 +3386,6 @@
 <file path=ppt/slides/slide5.xml><?xml version="1.0" encoding="utf-8"?>
 <p:sld xmlns:a="http://schemas.openxmlformats.org/drawingml/2006/main" xmlns:p="http://schemas.openxmlformats.org/presentationml/2006/main" xmlns:r="http://schemas.openxmlformats.org/officeDocument/2006/relationships">
   <p:cSld>
-    <p:bg>
-      <p:bgPr>
-        <a:solidFill>
-          <a:srgbClr val="0A1A1A"/>
-        </a:solidFill>
-        <a:effectLst/>
-      </p:bgPr>
-    </p:bg>
     <p:spTree>
       <p:nvGrpSpPr>
         <p:cNvPr id="1" name=""/>
@@ -3474,7 +3410,7 @@
         <p:spPr>
           <a:xfrm>
             <a:off x="0" y="0"/>
-            <a:ext cx="12192000" cy="6858000"/>
+            <a:ext cx="12191695" cy="6858000"/>
           </a:xfrm>
           <a:prstGeom prst="rect">
             <a:avLst/>
@@ -3492,14 +3428,6 @@
 <file path=ppt/slides/slide6.xml><?xml version="1.0" encoding="utf-8"?>
 <p:sld xmlns:a="http://schemas.openxmlformats.org/drawingml/2006/main" xmlns:p="http://schemas.openxmlformats.org/presentationml/2006/main" xmlns:r="http://schemas.openxmlformats.org/officeDocument/2006/relationships">
   <p:cSld>
-    <p:bg>
-      <p:bgPr>
-        <a:solidFill>
-          <a:srgbClr val="0A1A1A"/>
-        </a:solidFill>
-        <a:effectLst/>
-      </p:bgPr>
-    </p:bg>
     <p:spTree>
       <p:nvGrpSpPr>
         <p:cNvPr id="1" name=""/>
@@ -3524,7 +3452,7 @@
         <p:spPr>
           <a:xfrm>
             <a:off x="0" y="0"/>
-            <a:ext cx="12192000" cy="6858000"/>
+            <a:ext cx="12191695" cy="6858000"/>
           </a:xfrm>
           <a:prstGeom prst="rect">
             <a:avLst/>
@@ -3542,14 +3470,6 @@
 <file path=ppt/slides/slide7.xml><?xml version="1.0" encoding="utf-8"?>
 <p:sld xmlns:a="http://schemas.openxmlformats.org/drawingml/2006/main" xmlns:p="http://schemas.openxmlformats.org/presentationml/2006/main" xmlns:r="http://schemas.openxmlformats.org/officeDocument/2006/relationships">
   <p:cSld>
-    <p:bg>
-      <p:bgPr>
-        <a:solidFill>
-          <a:srgbClr val="0A1A1A"/>
-        </a:solidFill>
-        <a:effectLst/>
-      </p:bgPr>
-    </p:bg>
     <p:spTree>
       <p:nvGrpSpPr>
         <p:cNvPr id="1" name=""/>
@@ -3574,7 +3494,7 @@
         <p:spPr>
           <a:xfrm>
             <a:off x="0" y="0"/>
-            <a:ext cx="12192000" cy="6858000"/>
+            <a:ext cx="12191695" cy="6858000"/>
           </a:xfrm>
           <a:prstGeom prst="rect">
             <a:avLst/>
@@ -3592,14 +3512,6 @@
 <file path=ppt/slides/slide8.xml><?xml version="1.0" encoding="utf-8"?>
 <p:sld xmlns:a="http://schemas.openxmlformats.org/drawingml/2006/main" xmlns:p="http://schemas.openxmlformats.org/presentationml/2006/main" xmlns:r="http://schemas.openxmlformats.org/officeDocument/2006/relationships">
   <p:cSld>
-    <p:bg>
-      <p:bgPr>
-        <a:solidFill>
-          <a:srgbClr val="0A1A1A"/>
-        </a:solidFill>
-        <a:effectLst/>
-      </p:bgPr>
-    </p:bg>
     <p:spTree>
       <p:nvGrpSpPr>
         <p:cNvPr id="1" name=""/>
@@ -3624,7 +3536,7 @@
         <p:spPr>
           <a:xfrm>
             <a:off x="0" y="0"/>
-            <a:ext cx="12192000" cy="6858000"/>
+            <a:ext cx="12191695" cy="6858000"/>
           </a:xfrm>
           <a:prstGeom prst="rect">
             <a:avLst/>
@@ -3642,14 +3554,6 @@
 <file path=ppt/slides/slide9.xml><?xml version="1.0" encoding="utf-8"?>
 <p:sld xmlns:a="http://schemas.openxmlformats.org/drawingml/2006/main" xmlns:p="http://schemas.openxmlformats.org/presentationml/2006/main" xmlns:r="http://schemas.openxmlformats.org/officeDocument/2006/relationships">
   <p:cSld>
-    <p:bg>
-      <p:bgPr>
-        <a:solidFill>
-          <a:srgbClr val="0A1A1A"/>
-        </a:solidFill>
-        <a:effectLst/>
-      </p:bgPr>
-    </p:bg>
     <p:spTree>
       <p:nvGrpSpPr>
         <p:cNvPr id="1" name=""/>
@@ -3674,7 +3578,7 @@
         <p:spPr>
           <a:xfrm>
             <a:off x="0" y="0"/>
-            <a:ext cx="12192000" cy="6858000"/>
+            <a:ext cx="12191695" cy="6858000"/>
           </a:xfrm>
           <a:prstGeom prst="rect">
             <a:avLst/>
